--- a/Misc/Docker-Notes.pptx
+++ b/Misc/Docker-Notes.pptx
@@ -8,7 +8,7 @@
     <p:notesMasterId r:id="rId4"/>
   </p:notesMasterIdLst>
   <p:handoutMasterIdLst>
-    <p:handoutMasterId r:id="rId40"/>
+    <p:handoutMasterId r:id="rId41"/>
   </p:handoutMasterIdLst>
   <p:sldIdLst>
     <p:sldId id="256" r:id="rId3"/>
@@ -47,11 +47,12 @@
     <p:sldId id="405" r:id="rId37"/>
     <p:sldId id="398" r:id="rId38"/>
     <p:sldId id="326" r:id="rId39"/>
+    <p:sldId id="443" r:id="rId40"/>
   </p:sldIdLst>
   <p:sldSz cx="12192000" cy="6858000"/>
   <p:notesSz cx="6858000" cy="9144000"/>
   <p:custDataLst>
-    <p:tags r:id="rId44"/>
+    <p:tags r:id="rId45"/>
   </p:custDataLst>
   <p:defaultTextStyle>
     <a:defPPr>
@@ -4377,7 +4378,7 @@
         </p:nvGraphicFramePr>
         <p:xfrm>
           <a:off x="633095" y="1003300"/>
-          <a:ext cx="11131550" cy="4995545"/>
+          <a:ext cx="11131550" cy="5092065"/>
         </p:xfrm>
         <a:graphic>
           <a:graphicData uri="http://schemas.openxmlformats.org/drawingml/2006/table">
@@ -4386,11 +4387,11 @@
                 <a:tableStyleId>{5C22544A-7EE6-4342-B048-85BDC9FD1C3A}</a:tableStyleId>
               </a:tblPr>
               <a:tblGrid>
-                <a:gridCol w="5051425"/>
-                <a:gridCol w="3806190"/>
-                <a:gridCol w="2273935"/>
+                <a:gridCol w="4199255"/>
+                <a:gridCol w="3250565"/>
+                <a:gridCol w="3681730"/>
               </a:tblGrid>
-              <a:tr h="347345">
+              <a:tr h="335280">
                 <a:tc>
                   <a:txBody>
                     <a:bodyPr/>
@@ -4440,7 +4441,7 @@
                   <a:tcPr/>
                 </a:tc>
               </a:tr>
-              <a:tr h="315595">
+              <a:tr h="274320">
                 <a:tc>
                   <a:txBody>
                     <a:bodyPr/>
@@ -4449,10 +4450,10 @@
                         <a:buNone/>
                       </a:pPr>
                       <a:r>
-                        <a:rPr lang="en-US" altLang="zh-CN" sz="1400"/>
+                        <a:rPr lang="en-US" altLang="zh-CN" sz="1200"/>
                         <a:t>docker version</a:t>
                       </a:r>
-                      <a:endParaRPr lang="en-US" altLang="zh-CN" sz="1400"/>
+                      <a:endParaRPr lang="en-US" altLang="zh-CN" sz="1200"/>
                     </a:p>
                   </a:txBody>
                   <a:tcPr/>
@@ -4464,7 +4465,7 @@
                       <a:pPr>
                         <a:buNone/>
                       </a:pPr>
-                      <a:endParaRPr lang="en-US" altLang="zh-CN" sz="1400"/>
+                      <a:endParaRPr lang="en-US" altLang="zh-CN" sz="1200"/>
                     </a:p>
                   </a:txBody>
                   <a:tcPr/>
@@ -4476,13 +4477,13 @@
                       <a:pPr>
                         <a:buNone/>
                       </a:pPr>
-                      <a:endParaRPr lang="zh-CN" altLang="en-US" sz="1400"/>
+                      <a:endParaRPr lang="zh-CN" altLang="en-US" sz="1200"/>
                     </a:p>
                   </a:txBody>
                   <a:tcPr/>
                 </a:tc>
               </a:tr>
-              <a:tr h="315595">
+              <a:tr h="274320">
                 <a:tc>
                   <a:txBody>
                     <a:bodyPr/>
@@ -4491,10 +4492,10 @@
                         <a:buNone/>
                       </a:pPr>
                       <a:r>
-                        <a:rPr lang="en-US" altLang="zh-CN" sz="1400" b="1"/>
+                        <a:rPr lang="en-US" altLang="zh-CN" sz="1200" b="1"/>
                         <a:t>docker info</a:t>
                       </a:r>
-                      <a:endParaRPr lang="en-US" altLang="zh-CN" sz="1400" b="1"/>
+                      <a:endParaRPr lang="en-US" altLang="zh-CN" sz="1200" b="1"/>
                     </a:p>
                   </a:txBody>
                   <a:tcPr/>
@@ -4506,7 +4507,7 @@
                       <a:pPr>
                         <a:buNone/>
                       </a:pPr>
-                      <a:endParaRPr lang="en-US" altLang="zh-CN" sz="1400"/>
+                      <a:endParaRPr lang="en-US" altLang="zh-CN" sz="1200"/>
                     </a:p>
                   </a:txBody>
                   <a:tcPr/>
@@ -4518,13 +4519,13 @@
                       <a:pPr>
                         <a:buNone/>
                       </a:pPr>
-                      <a:endParaRPr lang="zh-CN" altLang="en-US" sz="1400"/>
+                      <a:endParaRPr lang="zh-CN" altLang="en-US" sz="1200"/>
                     </a:p>
                   </a:txBody>
                   <a:tcPr/>
                 </a:tc>
               </a:tr>
-              <a:tr h="315595">
+              <a:tr h="274320">
                 <a:tc>
                   <a:txBody>
                     <a:bodyPr/>
@@ -4533,10 +4534,10 @@
                         <a:buNone/>
                       </a:pPr>
                       <a:r>
-                        <a:rPr lang="en-US" altLang="zh-CN" sz="1400"/>
+                        <a:rPr lang="en-US" altLang="zh-CN" sz="1200"/>
                         <a:t>docker pull {image-name}</a:t>
                       </a:r>
-                      <a:endParaRPr lang="en-US" altLang="zh-CN" sz="1400"/>
+                      <a:endParaRPr lang="en-US" altLang="zh-CN" sz="1200"/>
                     </a:p>
                   </a:txBody>
                   <a:tcPr/>
@@ -4549,10 +4550,10 @@
                         <a:buNone/>
                       </a:pPr>
                       <a:r>
-                        <a:rPr lang="en-US" altLang="zh-CN" sz="1400"/>
+                        <a:rPr lang="en-US" altLang="zh-CN" sz="1200"/>
                         <a:t>Pull docker image from registry</a:t>
                       </a:r>
-                      <a:endParaRPr lang="en-US" altLang="zh-CN" sz="1400"/>
+                      <a:endParaRPr lang="en-US" altLang="zh-CN" sz="1200"/>
                     </a:p>
                   </a:txBody>
                   <a:tcPr/>
@@ -4565,16 +4566,16 @@
                         <a:buNone/>
                       </a:pPr>
                       <a:r>
-                        <a:rPr lang="en-US" altLang="zh-CN" sz="1400"/>
+                        <a:rPr lang="en-US" altLang="zh-CN" sz="1200"/>
                         <a:t>docker pull busybox</a:t>
                       </a:r>
-                      <a:endParaRPr lang="en-US" altLang="zh-CN" sz="1400"/>
+                      <a:endParaRPr lang="en-US" altLang="zh-CN" sz="1200"/>
                     </a:p>
                   </a:txBody>
                   <a:tcPr/>
                 </a:tc>
               </a:tr>
-              <a:tr h="315595">
+              <a:tr h="274320">
                 <a:tc>
                   <a:txBody>
                     <a:bodyPr/>
@@ -4583,10 +4584,10 @@
                         <a:buNone/>
                       </a:pPr>
                       <a:r>
-                        <a:rPr lang="en-US" altLang="zh-CN" sz="1400"/>
+                        <a:rPr lang="en-US" altLang="zh-CN" sz="1200"/>
                         <a:t>docker build . -t {image-name}</a:t>
                       </a:r>
-                      <a:endParaRPr lang="en-US" altLang="zh-CN" sz="1400"/>
+                      <a:endParaRPr lang="en-US" altLang="zh-CN" sz="1200"/>
                     </a:p>
                   </a:txBody>
                   <a:tcPr/>
@@ -4599,10 +4600,10 @@
                         <a:buNone/>
                       </a:pPr>
                       <a:r>
-                        <a:rPr lang="en-US" altLang="zh-CN" sz="1400"/>
+                        <a:rPr lang="en-US" altLang="zh-CN" sz="1200"/>
                         <a:t>Build docker</a:t>
                       </a:r>
-                      <a:endParaRPr lang="en-US" altLang="zh-CN" sz="1400"/>
+                      <a:endParaRPr lang="en-US" altLang="zh-CN" sz="1200"/>
                     </a:p>
                   </a:txBody>
                   <a:tcPr/>
@@ -4614,13 +4615,27 @@
                       <a:pPr>
                         <a:buNone/>
                       </a:pPr>
-                      <a:endParaRPr lang="en-US" altLang="zh-CN" sz="1400"/>
+                      <a:r>
+                        <a:rPr lang="en-US" altLang="zh-CN" sz="1200"/>
+                        <a:t>--no-cache</a:t>
+                      </a:r>
+                      <a:endParaRPr lang="en-US" altLang="zh-CN" sz="1200"/>
+                    </a:p>
+                    <a:p>
+                      <a:pPr>
+                        <a:buNone/>
+                      </a:pPr>
+                      <a:r>
+                        <a:rPr lang="en-US" altLang="zh-CN" sz="1200"/>
+                        <a:t>--progress=plain</a:t>
+                      </a:r>
+                      <a:endParaRPr lang="en-US" altLang="zh-CN" sz="1200"/>
                     </a:p>
                   </a:txBody>
                   <a:tcPr/>
                 </a:tc>
               </a:tr>
-              <a:tr h="315595">
+              <a:tr h="1005840">
                 <a:tc>
                   <a:txBody>
                     <a:bodyPr/>
@@ -4629,26 +4644,52 @@
                         <a:buNone/>
                       </a:pPr>
                       <a:r>
-                        <a:rPr lang="en-US" altLang="zh-CN" sz="1400"/>
+                        <a:rPr lang="en-US" altLang="zh-CN" sz="1200"/>
                         <a:t>docker run -p 8081:8080 -d {image-name}</a:t>
                       </a:r>
-                      <a:endParaRPr lang="en-US" altLang="zh-CN" sz="1400"/>
-                    </a:p>
-                  </a:txBody>
-                  <a:tcPr/>
-                </a:tc>
-                <a:tc>
-                  <a:txBody>
-                    <a:bodyPr/>
+                      <a:endParaRPr lang="en-US" altLang="zh-CN" sz="1200"/>
+                    </a:p>
                     <a:p>
                       <a:pPr>
                         <a:buNone/>
                       </a:pPr>
-                      <a:r>
-                        <a:rPr lang="en-US" altLang="zh-CN" sz="1400"/>
+                      <a:endParaRPr lang="en-US" altLang="zh-CN" sz="1200"/>
+                    </a:p>
+                    <a:p>
+                      <a:pPr>
+                        <a:buNone/>
+                      </a:pPr>
+                      <a:r>
+                        <a:rPr lang="en-US" altLang="zh-CN" sz="1200"/>
+                        <a:t>sudo docker run --name pytorch1.12.1_container -it --gpus all pytorch/pytorch:1.12.1-cuda11.</a:t>
+                      </a:r>
+                      <a:endParaRPr lang="en-US" altLang="zh-CN" sz="1200"/>
+                    </a:p>
+                    <a:p>
+                      <a:pPr>
+                        <a:buNone/>
+                      </a:pPr>
+                      <a:r>
+                        <a:rPr lang="en-US" altLang="zh-CN" sz="1200"/>
+                        <a:t>3-cudnn8-runtime</a:t>
+                      </a:r>
+                      <a:endParaRPr lang="en-US" altLang="zh-CN" sz="1200"/>
+                    </a:p>
+                  </a:txBody>
+                  <a:tcPr/>
+                </a:tc>
+                <a:tc>
+                  <a:txBody>
+                    <a:bodyPr/>
+                    <a:p>
+                      <a:pPr>
+                        <a:buNone/>
+                      </a:pPr>
+                      <a:r>
+                        <a:rPr lang="en-US" altLang="zh-CN" sz="1200"/>
                         <a:t>Run docker image</a:t>
                       </a:r>
-                      <a:endParaRPr lang="en-US" altLang="zh-CN" sz="1400"/>
+                      <a:endParaRPr lang="en-US" altLang="zh-CN" sz="1200"/>
                     </a:p>
                   </a:txBody>
                   <a:tcPr/>
@@ -4660,13 +4701,57 @@
                       <a:pPr>
                         <a:buNone/>
                       </a:pPr>
-                      <a:endParaRPr lang="en-US" altLang="zh-CN" sz="1400"/>
+                      <a:r>
+                        <a:rPr lang="en-US" altLang="zh-CN" sz="1200"/>
+                        <a:t>-d: Run in detached mode (background).</a:t>
+                      </a:r>
+                      <a:endParaRPr lang="en-US" altLang="zh-CN" sz="1200"/>
+                    </a:p>
+                    <a:p>
+                      <a:pPr>
+                        <a:buNone/>
+                      </a:pPr>
+                      <a:r>
+                        <a:rPr lang="en-US" altLang="zh-CN" sz="1200"/>
+                        <a:t>-it: interactively with a terminal.</a:t>
+                      </a:r>
+                      <a:endParaRPr lang="en-US" altLang="zh-CN" sz="1200"/>
+                    </a:p>
+                    <a:p>
+                      <a:pPr>
+                        <a:buNone/>
+                      </a:pPr>
+                      <a:r>
+                        <a:rPr lang="en-US" altLang="zh-CN" sz="1200"/>
+                        <a:t>-p: Map a container port to a host port.</a:t>
+                      </a:r>
+                      <a:endParaRPr lang="en-US" altLang="zh-CN" sz="1200"/>
+                    </a:p>
+                    <a:p>
+                      <a:pPr>
+                        <a:buNone/>
+                      </a:pPr>
+                      <a:r>
+                        <a:rPr lang="en-US" altLang="zh-CN" sz="1200"/>
+                        <a:t>--name: Assign a name to the container.</a:t>
+                      </a:r>
+                      <a:endParaRPr lang="en-US" altLang="zh-CN" sz="1200"/>
+                    </a:p>
+                    <a:p>
+                      <a:pPr>
+                        <a:buNone/>
+                      </a:pPr>
+                      <a:r>
+                        <a:rPr lang="en-US" altLang="zh-CN" sz="1200"/>
+                        <a:t>--gpus: Specify GPU access (e.g., --gpus all).</a:t>
+                      </a:r>
+                      <a:endParaRPr lang="en-US" altLang="zh-CN" sz="1200"/>
                     </a:p>
                   </a:txBody>
                   <a:tcPr/>
                 </a:tc>
               </a:tr>
-              <a:tr h="315595">
+              <a:tr h="274320">
                 <a:tc>
                   <a:txBody>
                     <a:bodyPr/>
@@ -4675,10 +4760,10 @@
                         <a:buNone/>
                       </a:pPr>
                       <a:r>
-                        <a:rPr lang="en-US" altLang="zh-CN" sz="1400"/>
+                        <a:rPr lang="en-US" altLang="zh-CN" sz="1200"/>
                         <a:t>docker stop {container-id}</a:t>
                       </a:r>
-                      <a:endParaRPr lang="en-US" altLang="zh-CN" sz="1400"/>
+                      <a:endParaRPr lang="en-US" altLang="zh-CN" sz="1200"/>
                     </a:p>
                   </a:txBody>
                   <a:tcPr/>
@@ -4690,7 +4775,7 @@
                       <a:pPr>
                         <a:buNone/>
                       </a:pPr>
-                      <a:endParaRPr lang="en-US" altLang="zh-CN" sz="1400"/>
+                      <a:endParaRPr lang="en-US" altLang="zh-CN" sz="1200"/>
                     </a:p>
                   </a:txBody>
                   <a:tcPr/>
@@ -4702,13 +4787,13 @@
                       <a:pPr>
                         <a:buNone/>
                       </a:pPr>
-                      <a:endParaRPr lang="en-US" altLang="zh-CN" sz="1400"/>
+                      <a:endParaRPr lang="en-US" altLang="zh-CN" sz="1200"/>
                     </a:p>
                   </a:txBody>
                   <a:tcPr/>
                 </a:tc>
               </a:tr>
-              <a:tr h="315595">
+              <a:tr h="274320">
                 <a:tc>
                   <a:txBody>
                     <a:bodyPr/>
@@ -4717,10 +4802,10 @@
                         <a:buNone/>
                       </a:pPr>
                       <a:r>
-                        <a:rPr lang="en-US" altLang="zh-CN" sz="1400"/>
+                        <a:rPr lang="en-US" altLang="zh-CN" sz="1200" b="1"/>
                         <a:t>docker stop $(docker ps -q)</a:t>
                       </a:r>
-                      <a:endParaRPr lang="en-US" altLang="zh-CN" sz="1400"/>
+                      <a:endParaRPr lang="en-US" altLang="zh-CN" sz="1200" b="1"/>
                     </a:p>
                   </a:txBody>
                   <a:tcPr/>
@@ -4733,10 +4818,10 @@
                         <a:buNone/>
                       </a:pPr>
                       <a:r>
-                        <a:rPr lang="en-US" altLang="zh-CN" sz="1400"/>
+                        <a:rPr lang="en-US" altLang="zh-CN" sz="1200"/>
                         <a:t>stop all containers</a:t>
                       </a:r>
-                      <a:endParaRPr lang="en-US" altLang="zh-CN" sz="1400"/>
+                      <a:endParaRPr lang="en-US" altLang="zh-CN" sz="1200"/>
                     </a:p>
                   </a:txBody>
                   <a:tcPr/>
@@ -4748,13 +4833,13 @@
                       <a:pPr>
                         <a:buNone/>
                       </a:pPr>
-                      <a:endParaRPr lang="en-US" altLang="zh-CN" sz="1400"/>
+                      <a:endParaRPr lang="en-US" altLang="zh-CN" sz="1200"/>
                     </a:p>
                   </a:txBody>
                   <a:tcPr/>
                 </a:tc>
               </a:tr>
-              <a:tr h="536575">
+              <a:tr h="457200">
                 <a:tc>
                   <a:txBody>
                     <a:bodyPr/>
@@ -4763,20 +4848,20 @@
                         <a:buNone/>
                       </a:pPr>
                       <a:r>
-                        <a:rPr lang="en-US" altLang="zh-CN" sz="1400"/>
+                        <a:rPr lang="en-US" altLang="zh-CN" sz="1200"/>
                         <a:t>docker ps</a:t>
                       </a:r>
-                      <a:endParaRPr lang="en-US" altLang="zh-CN" sz="1400"/>
+                      <a:endParaRPr lang="en-US" altLang="zh-CN" sz="1200"/>
                     </a:p>
                     <a:p>
                       <a:pPr>
                         <a:buNone/>
                       </a:pPr>
                       <a:r>
-                        <a:rPr lang="en-US" altLang="zh-CN" sz="1400"/>
+                        <a:rPr lang="en-US" altLang="zh-CN" sz="1200"/>
                         <a:t>docker ps -aq</a:t>
                       </a:r>
-                      <a:endParaRPr lang="en-US" altLang="zh-CN" sz="1400"/>
+                      <a:endParaRPr lang="en-US" altLang="zh-CN" sz="1200"/>
                     </a:p>
                   </a:txBody>
                   <a:tcPr/>
@@ -4789,20 +4874,20 @@
                         <a:buNone/>
                       </a:pPr>
                       <a:r>
-                        <a:rPr lang="en-US" altLang="zh-CN" sz="1400"/>
+                        <a:rPr lang="en-US" altLang="zh-CN" sz="1200"/>
                         <a:t>List docker images and container ids</a:t>
                       </a:r>
-                      <a:endParaRPr lang="en-US" altLang="zh-CN" sz="1400"/>
+                      <a:endParaRPr lang="en-US" altLang="zh-CN" sz="1200"/>
                     </a:p>
                     <a:p>
                       <a:pPr>
                         <a:buNone/>
                       </a:pPr>
                       <a:r>
-                        <a:rPr lang="en-US" altLang="zh-CN" sz="1400"/>
+                        <a:rPr lang="en-US" altLang="zh-CN" sz="1200"/>
                         <a:t>List container ids</a:t>
                       </a:r>
-                      <a:endParaRPr lang="en-US" altLang="zh-CN" sz="1400"/>
+                      <a:endParaRPr lang="en-US" altLang="zh-CN" sz="1200"/>
                     </a:p>
                   </a:txBody>
                   <a:tcPr/>
@@ -4814,13 +4899,13 @@
                       <a:pPr>
                         <a:buNone/>
                       </a:pPr>
-                      <a:endParaRPr lang="zh-CN" altLang="en-US" sz="1400"/>
+                      <a:endParaRPr lang="zh-CN" altLang="en-US" sz="1200"/>
                     </a:p>
                   </a:txBody>
                   <a:tcPr/>
                 </a:tc>
               </a:tr>
-              <a:tr h="315595">
+              <a:tr h="274320">
                 <a:tc>
                   <a:txBody>
                     <a:bodyPr/>
@@ -4829,10 +4914,10 @@
                         <a:buNone/>
                       </a:pPr>
                       <a:r>
-                        <a:rPr lang="en-US" altLang="zh-CN" sz="1400"/>
+                        <a:rPr lang="en-US" altLang="zh-CN" sz="1200"/>
                         <a:t>docker logs -f {container-id}</a:t>
                       </a:r>
-                      <a:endParaRPr lang="en-US" altLang="zh-CN" sz="1400"/>
+                      <a:endParaRPr lang="en-US" altLang="zh-CN" sz="1200"/>
                     </a:p>
                   </a:txBody>
                   <a:tcPr/>
@@ -4845,10 +4930,10 @@
                         <a:buNone/>
                       </a:pPr>
                       <a:r>
-                        <a:rPr lang="en-US" altLang="zh-CN" sz="1400"/>
+                        <a:rPr lang="en-US" altLang="zh-CN" sz="1200"/>
                         <a:t>Show logs in docker image, -f follow</a:t>
                       </a:r>
-                      <a:endParaRPr lang="en-US" altLang="zh-CN" sz="1400"/>
+                      <a:endParaRPr lang="en-US" altLang="zh-CN" sz="1200"/>
                     </a:p>
                   </a:txBody>
                   <a:tcPr/>
@@ -4860,13 +4945,13 @@
                       <a:pPr>
                         <a:buNone/>
                       </a:pPr>
-                      <a:endParaRPr lang="zh-CN" altLang="en-US" sz="1400"/>
+                      <a:endParaRPr lang="zh-CN" altLang="en-US" sz="1200"/>
                     </a:p>
                   </a:txBody>
                   <a:tcPr/>
                 </a:tc>
               </a:tr>
-              <a:tr h="315595">
+              <a:tr h="274320">
                 <a:tc>
                   <a:txBody>
                     <a:bodyPr/>
@@ -4875,12 +4960,12 @@
                         <a:buNone/>
                       </a:pPr>
                       <a:r>
-                        <a:rPr lang="en-US" altLang="zh-CN" sz="1400">
+                        <a:rPr lang="en-US" altLang="zh-CN" sz="1200">
                           <a:sym typeface="+mn-ea"/>
                         </a:rPr>
                         <a:t>docker network ls</a:t>
                       </a:r>
-                      <a:endParaRPr lang="en-US" altLang="zh-CN" sz="1400">
+                      <a:endParaRPr lang="en-US" altLang="zh-CN" sz="1200">
                         <a:sym typeface="+mn-ea"/>
                       </a:endParaRPr>
                     </a:p>
@@ -4895,10 +4980,10 @@
                         <a:buNone/>
                       </a:pPr>
                       <a:r>
-                        <a:rPr lang="en-US" altLang="zh-CN" sz="1400"/>
+                        <a:rPr lang="en-US" altLang="zh-CN" sz="1200"/>
                         <a:t>List network names for containers</a:t>
                       </a:r>
-                      <a:endParaRPr lang="en-US" altLang="zh-CN" sz="1400"/>
+                      <a:endParaRPr lang="en-US" altLang="zh-CN" sz="1200"/>
                     </a:p>
                   </a:txBody>
                   <a:tcPr/>
@@ -4910,13 +4995,13 @@
                       <a:pPr>
                         <a:buNone/>
                       </a:pPr>
-                      <a:endParaRPr lang="zh-CN" altLang="en-US" sz="1400"/>
+                      <a:endParaRPr lang="zh-CN" altLang="en-US" sz="1200"/>
                     </a:p>
                   </a:txBody>
                   <a:tcPr/>
                 </a:tc>
               </a:tr>
-              <a:tr h="315595">
+              <a:tr h="274320">
                 <a:tc>
                   <a:txBody>
                     <a:bodyPr/>
@@ -4925,12 +5010,12 @@
                         <a:buNone/>
                       </a:pPr>
                       <a:r>
-                        <a:rPr lang="en-US" altLang="zh-CN" sz="1400">
+                        <a:rPr lang="en-US" altLang="zh-CN" sz="1200">
                           <a:sym typeface="+mn-ea"/>
                         </a:rPr>
                         <a:t>docker network inspect {network_name}</a:t>
                       </a:r>
-                      <a:endParaRPr lang="en-US" altLang="zh-CN" sz="1400">
+                      <a:endParaRPr lang="en-US" altLang="zh-CN" sz="1200">
                         <a:sym typeface="+mn-ea"/>
                       </a:endParaRPr>
                     </a:p>
@@ -4944,7 +5029,7 @@
                       <a:pPr>
                         <a:buNone/>
                       </a:pPr>
-                      <a:endParaRPr lang="en-US" altLang="zh-CN" sz="1400"/>
+                      <a:endParaRPr lang="en-US" altLang="zh-CN" sz="1200"/>
                     </a:p>
                   </a:txBody>
                   <a:tcPr/>
@@ -4956,13 +5041,13 @@
                       <a:pPr>
                         <a:buNone/>
                       </a:pPr>
-                      <a:endParaRPr lang="zh-CN" altLang="en-US" sz="1400"/>
+                      <a:endParaRPr lang="zh-CN" altLang="en-US" sz="1200"/>
                     </a:p>
                   </a:txBody>
                   <a:tcPr/>
                 </a:tc>
               </a:tr>
-              <a:tr h="419100">
+              <a:tr h="367665">
                 <a:tc>
                   <a:txBody>
                     <a:bodyPr/>
@@ -4971,12 +5056,12 @@
                         <a:buNone/>
                       </a:pPr>
                       <a:r>
-                        <a:rPr lang="en-US" altLang="zh-CN" sz="1400">
+                        <a:rPr lang="en-US" altLang="zh-CN" sz="1200">
                           <a:sym typeface="+mn-ea"/>
                         </a:rPr>
                         <a:t>docker exec -it &lt;container_name&gt; /bin/bash</a:t>
                       </a:r>
-                      <a:endParaRPr lang="en-US" altLang="zh-CN" sz="1400">
+                      <a:endParaRPr lang="en-US" altLang="zh-CN" sz="1200">
                         <a:sym typeface="+mn-ea"/>
                       </a:endParaRPr>
                     </a:p>
@@ -4991,10 +5076,10 @@
                         <a:buNone/>
                       </a:pPr>
                       <a:r>
-                        <a:rPr lang="en-US" altLang="zh-CN" sz="1400"/>
+                        <a:rPr lang="en-US" altLang="zh-CN" sz="1200"/>
                         <a:t>Run bash in container in interactive mode</a:t>
                       </a:r>
-                      <a:endParaRPr lang="en-US" altLang="zh-CN" sz="1400"/>
+                      <a:endParaRPr lang="en-US" altLang="zh-CN" sz="1200"/>
                     </a:p>
                   </a:txBody>
                   <a:tcPr/>
@@ -5006,13 +5091,13 @@
                       <a:pPr>
                         <a:buNone/>
                       </a:pPr>
-                      <a:endParaRPr lang="zh-CN" altLang="en-US" sz="1400"/>
+                      <a:endParaRPr lang="zh-CN" altLang="en-US" sz="1200"/>
                     </a:p>
                   </a:txBody>
                   <a:tcPr/>
                 </a:tc>
               </a:tr>
-              <a:tr h="536575">
+              <a:tr h="457200">
                 <a:tc>
                   <a:txBody>
                     <a:bodyPr/>
@@ -5021,20 +5106,20 @@
                         <a:buNone/>
                       </a:pPr>
                       <a:r>
-                        <a:rPr lang="en-US" altLang="zh-CN" sz="1400"/>
+                        <a:rPr lang="en-US" altLang="zh-CN" sz="1200"/>
                         <a:t>docker cp {local_file} {image_name}:{dir_in_image}</a:t>
                       </a:r>
-                      <a:endParaRPr lang="en-US" altLang="zh-CN" sz="1400"/>
+                      <a:endParaRPr lang="en-US" altLang="zh-CN" sz="1200"/>
                     </a:p>
                     <a:p>
                       <a:pPr>
                         <a:buNone/>
                       </a:pPr>
                       <a:r>
-                        <a:rPr lang="en-US" altLang="zh-CN" sz="1400"/>
+                        <a:rPr lang="en-US" altLang="zh-CN" sz="1200"/>
                         <a:t>docker cp {image_name}:{dir_in_image} {local_dir}</a:t>
                       </a:r>
-                      <a:endParaRPr lang="en-US" altLang="zh-CN" sz="1400"/>
+                      <a:endParaRPr lang="en-US" altLang="zh-CN" sz="1200"/>
                     </a:p>
                   </a:txBody>
                   <a:tcPr/>
@@ -5046,7 +5131,7 @@
                       <a:pPr>
                         <a:buNone/>
                       </a:pPr>
-                      <a:endParaRPr lang="en-US" altLang="zh-CN" sz="1400"/>
+                      <a:endParaRPr lang="en-US" altLang="zh-CN" sz="1200"/>
                     </a:p>
                   </a:txBody>
                   <a:tcPr/>
@@ -5058,7 +5143,7 @@
                       <a:pPr>
                         <a:buNone/>
                       </a:pPr>
-                      <a:endParaRPr lang="zh-CN" altLang="en-US" sz="1400"/>
+                      <a:endParaRPr lang="zh-CN" altLang="en-US" sz="1200"/>
                     </a:p>
                   </a:txBody>
                   <a:tcPr/>
@@ -5293,6 +5378,16 @@
                       <a:r>
                         <a:rPr lang="en-US" altLang="zh-CN"/>
                         <a:t>docker system prune</a:t>
+                      </a:r>
+                      <a:endParaRPr lang="en-US" altLang="zh-CN"/>
+                    </a:p>
+                    <a:p>
+                      <a:pPr>
+                        <a:buNone/>
+                      </a:pPr>
+                      <a:r>
+                        <a:rPr lang="en-US" altLang="zh-CN"/>
+                        <a:t>docker build prune</a:t>
                       </a:r>
                       <a:endParaRPr lang="en-US" altLang="zh-CN"/>
                     </a:p>
@@ -6980,7 +7075,7 @@
         <p:spPr>
           <a:xfrm>
             <a:off x="7369175" y="777875"/>
-            <a:ext cx="4341495" cy="2030095"/>
+            <a:ext cx="4341495" cy="2861310"/>
           </a:xfrm>
           <a:prstGeom prst="rect">
             <a:avLst/>
@@ -7030,7 +7125,26 @@
           <a:p>
             <a:r>
               <a:rPr lang="zh-CN" altLang="en-US"/>
-              <a:t>RUN apt-get install –y nginx </a:t>
+              <a:t>RUN apt-get install –y nginx</a:t>
+            </a:r>
+            <a:endParaRPr lang="zh-CN" altLang="en-US"/>
+          </a:p>
+          <a:p>
+            <a:r>
+              <a:rPr lang="en-US" altLang="zh-CN"/>
+              <a:t>RUN echo "Files in /:" &amp;&amp; ls -la / &amp;&amp; echo $(date)</a:t>
+            </a:r>
+            <a:r>
+              <a:rPr lang="zh-CN" altLang="en-US"/>
+              <a:t> </a:t>
+            </a:r>
+            <a:r>
+              <a:rPr lang="en-US" altLang="zh-CN"/>
+              <a:t># echo in build phase, avoid being cached</a:t>
+            </a:r>
+            <a:r>
+              <a:rPr lang="zh-CN" altLang="en-US"/>
+              <a:t> </a:t>
             </a:r>
             <a:endParaRPr lang="zh-CN" altLang="en-US"/>
           </a:p>
@@ -8096,7 +8210,7 @@
         </p:spPr>
         <p:txBody>
           <a:bodyPr>
-            <a:normAutofit fontScale="70000"/>
+            <a:normAutofit fontScale="60000"/>
           </a:bodyPr>
           <a:p>
             <a:pPr lvl="0"/>
@@ -8280,6 +8394,14 @@
             <a:endParaRPr lang="en-US" altLang="zh-CN" sz="1500">
               <a:sym typeface="+mn-ea"/>
             </a:endParaRPr>
+          </a:p>
+          <a:p>
+            <a:pPr lvl="3"/>
+            <a:r>
+              <a:rPr lang="en-US" altLang="zh-CN" sz="1500"/>
+              <a:t> typically used for persistent data storage and are managed by Docker</a:t>
+            </a:r>
+            <a:endParaRPr lang="en-US" altLang="zh-CN" sz="1500"/>
           </a:p>
           <a:p>
             <a:pPr lvl="2"/>
@@ -8692,10 +8814,18 @@
                         <a:buNone/>
                       </a:pPr>
                       <a:r>
-                        <a:rPr lang="en-US" altLang="zh-CN" sz="1600"/>
+                        <a:rPr lang="en-US" altLang="zh-CN" sz="1600" b="1">
+                          <a:solidFill>
+                            <a:schemeClr val="tx1"/>
+                          </a:solidFill>
+                        </a:rPr>
                         <a:t>docker compose config</a:t>
                       </a:r>
-                      <a:endParaRPr lang="en-US" altLang="zh-CN" sz="1600"/>
+                      <a:endParaRPr lang="en-US" altLang="zh-CN" sz="1600" b="1">
+                        <a:solidFill>
+                          <a:schemeClr val="tx1"/>
+                        </a:solidFill>
+                      </a:endParaRPr>
                     </a:p>
                   </a:txBody>
                   <a:tcPr/>
@@ -9330,7 +9460,7 @@
         </p:spPr>
         <p:txBody>
           <a:bodyPr>
-            <a:normAutofit fontScale="90000" lnSpcReduction="20000"/>
+            <a:normAutofit fontScale="70000"/>
           </a:bodyPr>
           <a:p>
             <a:r>
@@ -9392,6 +9522,14 @@
             <a:r>
               <a:rPr lang="en-US" altLang="zh-CN"/>
               <a:t>COMPOSE_PROJECT_NAME=SOMEPROJECTNAME</a:t>
+            </a:r>
+            <a:endParaRPr lang="en-US" altLang="zh-CN"/>
+          </a:p>
+          <a:p>
+            <a:pPr lvl="1"/>
+            <a:r>
+              <a:rPr lang="en-US" altLang="zh-CN" sz="2000"/>
+              <a:t>All containers, networks, volumes, and images are prepended with this project name.</a:t>
             </a:r>
             <a:endParaRPr lang="en-US" altLang="zh-CN"/>
           </a:p>
@@ -11387,7 +11525,7 @@
         <p:spPr>
           <a:xfrm>
             <a:off x="838200" y="1211580"/>
-            <a:ext cx="10515600" cy="4827270"/>
+            <a:ext cx="5775960" cy="4827270"/>
           </a:xfrm>
         </p:spPr>
         <p:txBody>
@@ -11568,6 +11706,287 @@
               <a:t>It may be caused by old volume in docker. Remove the old volume with “sudo docker-compose down -v”</a:t>
             </a:r>
             <a:endParaRPr lang="en-US" altLang="zh-CN" sz="1200"/>
+          </a:p>
+        </p:txBody>
+      </p:sp>
+      <p:sp>
+        <p:nvSpPr>
+          <p:cNvPr id="4" name="内容占位符 2"/>
+          <p:cNvSpPr>
+            <a:spLocks noGrp="1"/>
+          </p:cNvSpPr>
+          <p:nvPr/>
+        </p:nvSpPr>
+        <p:spPr>
+          <a:xfrm>
+            <a:off x="6614160" y="1211580"/>
+            <a:ext cx="5027930" cy="4549140"/>
+          </a:xfrm>
+          <a:prstGeom prst="rect">
+            <a:avLst/>
+          </a:prstGeom>
+        </p:spPr>
+        <p:txBody>
+          <a:bodyPr vert="horz" lIns="91440" tIns="45720" rIns="91440" bIns="45720" rtlCol="0">
+            <a:normAutofit/>
+          </a:bodyPr>
+          <a:lstStyle>
+            <a:lvl1pPr marL="342900" indent="-342900" algn="l" defTabSz="914400" rtl="0" eaLnBrk="1" latinLnBrk="0" hangingPunct="1">
+              <a:lnSpc>
+                <a:spcPct val="90000"/>
+              </a:lnSpc>
+              <a:spcBef>
+                <a:spcPts val="1000"/>
+              </a:spcBef>
+              <a:buFont typeface="黑体" panose="02010609060101010101" pitchFamily="49" charset="-122"/>
+              <a:buChar char="〉"/>
+              <a:defRPr sz="2400" kern="1200">
+                <a:solidFill>
+                  <a:schemeClr val="tx1"/>
+                </a:solidFill>
+                <a:latin typeface="+mn-lt"/>
+                <a:ea typeface="+mn-ea"/>
+                <a:cs typeface="+mn-cs"/>
+              </a:defRPr>
+            </a:lvl1pPr>
+            <a:lvl2pPr marL="800100" indent="-342900" algn="l" defTabSz="914400" rtl="0" eaLnBrk="1" latinLnBrk="0" hangingPunct="1">
+              <a:lnSpc>
+                <a:spcPct val="90000"/>
+              </a:lnSpc>
+              <a:spcBef>
+                <a:spcPts val="500"/>
+              </a:spcBef>
+              <a:buFont typeface="Arial" panose="020B0604020202020204" pitchFamily="34" charset="0"/>
+              <a:buChar char="•"/>
+              <a:defRPr sz="2000" kern="1200">
+                <a:solidFill>
+                  <a:schemeClr val="tx1"/>
+                </a:solidFill>
+                <a:latin typeface="+mn-lt"/>
+                <a:ea typeface="+mn-ea"/>
+                <a:cs typeface="+mn-cs"/>
+              </a:defRPr>
+            </a:lvl2pPr>
+            <a:lvl3pPr marL="1257300" indent="-342900" algn="l" defTabSz="914400" rtl="0" eaLnBrk="1" latinLnBrk="0" hangingPunct="1">
+              <a:lnSpc>
+                <a:spcPct val="90000"/>
+              </a:lnSpc>
+              <a:spcBef>
+                <a:spcPts val="500"/>
+              </a:spcBef>
+              <a:buFont typeface="Arial" panose="020B0604020202020204" pitchFamily="34" charset="0"/>
+              <a:buChar char="•"/>
+              <a:defRPr sz="1800" kern="1200">
+                <a:solidFill>
+                  <a:schemeClr val="tx1"/>
+                </a:solidFill>
+                <a:latin typeface="+mn-lt"/>
+                <a:ea typeface="+mn-ea"/>
+                <a:cs typeface="+mn-cs"/>
+              </a:defRPr>
+            </a:lvl3pPr>
+            <a:lvl4pPr marL="1657350" indent="-285750" algn="l" defTabSz="914400" rtl="0" eaLnBrk="1" latinLnBrk="0" hangingPunct="1">
+              <a:lnSpc>
+                <a:spcPct val="90000"/>
+              </a:lnSpc>
+              <a:spcBef>
+                <a:spcPts val="500"/>
+              </a:spcBef>
+              <a:buFont typeface="Arial" panose="020B0604020202020204" pitchFamily="34" charset="0"/>
+              <a:buChar char="•"/>
+              <a:defRPr sz="1800" kern="1200">
+                <a:solidFill>
+                  <a:schemeClr val="tx1"/>
+                </a:solidFill>
+                <a:latin typeface="+mn-lt"/>
+                <a:ea typeface="+mn-ea"/>
+                <a:cs typeface="+mn-cs"/>
+              </a:defRPr>
+            </a:lvl4pPr>
+            <a:lvl5pPr marL="2114550" indent="-285750" algn="l" defTabSz="914400" rtl="0" eaLnBrk="1" latinLnBrk="0" hangingPunct="1">
+              <a:lnSpc>
+                <a:spcPct val="90000"/>
+              </a:lnSpc>
+              <a:spcBef>
+                <a:spcPts val="500"/>
+              </a:spcBef>
+              <a:buFont typeface="Arial" panose="020B0604020202020204" pitchFamily="34" charset="0"/>
+              <a:buChar char="•"/>
+              <a:defRPr sz="1800" kern="1200">
+                <a:solidFill>
+                  <a:schemeClr val="tx1"/>
+                </a:solidFill>
+                <a:latin typeface="+mn-lt"/>
+                <a:ea typeface="+mn-ea"/>
+                <a:cs typeface="+mn-cs"/>
+              </a:defRPr>
+            </a:lvl5pPr>
+            <a:lvl6pPr marL="2514600" indent="-228600" algn="l" defTabSz="914400" rtl="0" eaLnBrk="1" latinLnBrk="0" hangingPunct="1">
+              <a:lnSpc>
+                <a:spcPct val="90000"/>
+              </a:lnSpc>
+              <a:spcBef>
+                <a:spcPts val="500"/>
+              </a:spcBef>
+              <a:buFont typeface="Arial" panose="020B0604020202020204" pitchFamily="34" charset="0"/>
+              <a:buChar char="•"/>
+              <a:defRPr sz="1800" kern="1200">
+                <a:solidFill>
+                  <a:schemeClr val="tx1"/>
+                </a:solidFill>
+                <a:latin typeface="+mn-lt"/>
+                <a:ea typeface="+mn-ea"/>
+                <a:cs typeface="+mn-cs"/>
+              </a:defRPr>
+            </a:lvl6pPr>
+            <a:lvl7pPr marL="2971800" indent="-228600" algn="l" defTabSz="914400" rtl="0" eaLnBrk="1" latinLnBrk="0" hangingPunct="1">
+              <a:lnSpc>
+                <a:spcPct val="90000"/>
+              </a:lnSpc>
+              <a:spcBef>
+                <a:spcPts val="500"/>
+              </a:spcBef>
+              <a:buFont typeface="Arial" panose="020B0604020202020204" pitchFamily="34" charset="0"/>
+              <a:buChar char="•"/>
+              <a:defRPr sz="1800" kern="1200">
+                <a:solidFill>
+                  <a:schemeClr val="tx1"/>
+                </a:solidFill>
+                <a:latin typeface="+mn-lt"/>
+                <a:ea typeface="+mn-ea"/>
+                <a:cs typeface="+mn-cs"/>
+              </a:defRPr>
+            </a:lvl7pPr>
+            <a:lvl8pPr marL="3429000" indent="-228600" algn="l" defTabSz="914400" rtl="0" eaLnBrk="1" latinLnBrk="0" hangingPunct="1">
+              <a:lnSpc>
+                <a:spcPct val="90000"/>
+              </a:lnSpc>
+              <a:spcBef>
+                <a:spcPts val="500"/>
+              </a:spcBef>
+              <a:buFont typeface="Arial" panose="020B0604020202020204" pitchFamily="34" charset="0"/>
+              <a:buChar char="•"/>
+              <a:defRPr sz="1800" kern="1200">
+                <a:solidFill>
+                  <a:schemeClr val="tx1"/>
+                </a:solidFill>
+                <a:latin typeface="+mn-lt"/>
+                <a:ea typeface="+mn-ea"/>
+                <a:cs typeface="+mn-cs"/>
+              </a:defRPr>
+            </a:lvl8pPr>
+            <a:lvl9pPr marL="3886200" indent="-228600" algn="l" defTabSz="914400" rtl="0" eaLnBrk="1" latinLnBrk="0" hangingPunct="1">
+              <a:lnSpc>
+                <a:spcPct val="90000"/>
+              </a:lnSpc>
+              <a:spcBef>
+                <a:spcPts val="500"/>
+              </a:spcBef>
+              <a:buFont typeface="Arial" panose="020B0604020202020204" pitchFamily="34" charset="0"/>
+              <a:buChar char="•"/>
+              <a:defRPr sz="1800" kern="1200">
+                <a:solidFill>
+                  <a:schemeClr val="tx1"/>
+                </a:solidFill>
+                <a:latin typeface="+mn-lt"/>
+                <a:ea typeface="+mn-ea"/>
+                <a:cs typeface="+mn-cs"/>
+              </a:defRPr>
+            </a:lvl9pPr>
+          </a:lstStyle>
+          <a:p>
+            <a:r>
+              <a:rPr lang="en-US" altLang="zh-CN" sz="1800"/>
+              <a:t>failed to solve: Pulling Schema 1 images have been deprecated and disabled by default since containerd v2.0. As a workaround you may set an environment variable `CONTAINERD_ENABLE_DEPRECATED_PULL_SCHEMA_1_IMAGE=1`, but this will be completely removed in containerd v2.1.</a:t>
+            </a:r>
+            <a:endParaRPr lang="en-US" altLang="zh-CN" sz="1800"/>
+          </a:p>
+          <a:p>
+            <a:pPr lvl="1"/>
+            <a:r>
+              <a:rPr lang="en-US" altLang="zh-CN" sz="1500"/>
+              <a:t>From docker version 27 and later, schema 1 images are not supported</a:t>
+            </a:r>
+            <a:endParaRPr lang="en-US" altLang="zh-CN" sz="1500"/>
+          </a:p>
+          <a:p>
+            <a:pPr lvl="1"/>
+            <a:r>
+              <a:rPr lang="en-US" altLang="zh-CN" sz="1500"/>
+              <a:t>Solution</a:t>
+            </a:r>
+            <a:endParaRPr lang="en-US" altLang="zh-CN" sz="1500"/>
+          </a:p>
+          <a:p>
+            <a:pPr lvl="2"/>
+            <a:r>
+              <a:rPr lang="en-US" altLang="zh-CN" sz="1350"/>
+              <a:t>sudo apt install -y docker-ce=5:26.1.4-1~ubuntu.20.04~focal docker-ce-cli=5:26.1.4-1~ubuntu.20.04~focal</a:t>
+            </a:r>
+            <a:endParaRPr lang="en-US" altLang="zh-CN" sz="1350"/>
+          </a:p>
+          <a:p>
+            <a:pPr lvl="1"/>
+            <a:endParaRPr lang="en-US" altLang="zh-CN" sz="1800"/>
+          </a:p>
+        </p:txBody>
+      </p:sp>
+    </p:spTree>
+    <p:custDataLst>
+      <p:tags r:id="rId1"/>
+    </p:custDataLst>
+  </p:cSld>
+  <p:clrMapOvr>
+    <a:masterClrMapping/>
+  </p:clrMapOvr>
+</p:sld>
+</file>
+
+<file path=ppt/slides/slide37.xml><?xml version="1.0" encoding="utf-8"?>
+<p:sld xmlns:a="http://schemas.openxmlformats.org/drawingml/2006/main" xmlns:r="http://schemas.openxmlformats.org/officeDocument/2006/relationships" xmlns:p="http://schemas.openxmlformats.org/presentationml/2006/main">
+  <p:cSld>
+    <p:spTree>
+      <p:nvGrpSpPr>
+        <p:cNvPr id="1" name=""/>
+        <p:cNvGrpSpPr/>
+        <p:nvPr/>
+      </p:nvGrpSpPr>
+      <p:grpSpPr/>
+      <p:sp>
+        <p:nvSpPr>
+          <p:cNvPr id="2" name="标题 1"/>
+          <p:cNvSpPr>
+            <a:spLocks noGrp="1"/>
+          </p:cNvSpPr>
+          <p:nvPr>
+            <p:ph type="title"/>
+          </p:nvPr>
+        </p:nvSpPr>
+        <p:spPr/>
+        <p:txBody>
+          <a:bodyPr/>
+          <a:p>
+            <a:r>
+              <a:rPr lang="en-US" altLang="zh-CN"/>
+              <a:t>FAQ2</a:t>
+            </a:r>
+            <a:endParaRPr lang="en-US" altLang="zh-CN"/>
+          </a:p>
+        </p:txBody>
+      </p:sp>
+      <p:sp>
+        <p:nvSpPr>
+          <p:cNvPr id="4" name="内容占位符 3"/>
+          <p:cNvSpPr/>
+          <p:nvPr>
+            <p:ph idx="1"/>
+          </p:nvPr>
+        </p:nvSpPr>
+        <p:spPr/>
+        <p:txBody>
+          <a:bodyPr/>
+          <a:p>
+            <a:endParaRPr lang="zh-CN" altLang="en-US"/>
           </a:p>
         </p:txBody>
       </p:sp>
@@ -11720,7 +12139,7 @@
             </a:pPr>
             <a:r>
               <a:rPr lang="en-US" altLang="zh-CN" sz="1400" i="1"/>
-              <a:t>sudo apt install -y docker-ce</a:t>
+              <a:t># sudo apt install -y docker-ce</a:t>
             </a:r>
             <a:r>
               <a:rPr lang="en-US" altLang="zh-CN" sz="1400" i="1">
@@ -13038,9 +13457,9 @@
 
 <file path=ppt/tags/tag18.xml><?xml version="1.0" encoding="utf-8"?>
 <p:tagLst xmlns:p="http://schemas.openxmlformats.org/presentationml/2006/main">
-  <p:tag name="KSO_WM_UNIT_TABLE_BEAUTIFY" val="smartTable{c521893a-0b97-4517-8b38-64f5a3b420b6}"/>
-  <p:tag name="TABLE_ENDDRAG_ORIGIN_RECT" val="876*393"/>
-  <p:tag name="TABLE_ENDDRAG_RECT" val="49*79*876*393"/>
+  <p:tag name="KSO_WM_UNIT_TABLE_BEAUTIFY" val="smartTable{4e9f41ed-e86b-4ecb-a85b-0604050b1234}"/>
+  <p:tag name="TABLE_ENDDRAG_ORIGIN_RECT" val="876*335"/>
+  <p:tag name="TABLE_ENDDRAG_RECT" val="49*79*876*335"/>
 </p:tagLst>
 </file>
 
@@ -13062,7 +13481,7 @@
 
 <file path=ppt/tags/tag20.xml><?xml version="1.0" encoding="utf-8"?>
 <p:tagLst xmlns:p="http://schemas.openxmlformats.org/presentationml/2006/main">
-  <p:tag name="KSO_WM_UNIT_TABLE_BEAUTIFY" val="smartTable{ae7cff78-4da9-4005-9973-5f5b92936b81}"/>
+  <p:tag name="KSO_WM_UNIT_TABLE_BEAUTIFY" val="smartTable{34c7d60c-0a0b-4b70-83a4-e536c228bd90}"/>
   <p:tag name="TABLE_ENDDRAG_ORIGIN_RECT" val="864*241"/>
   <p:tag name="TABLE_ENDDRAG_RECT" val="50*103*864*241"/>
 </p:tagLst>
@@ -13078,7 +13497,7 @@
 
 <file path=ppt/tags/tag22.xml><?xml version="1.0" encoding="utf-8"?>
 <p:tagLst xmlns:p="http://schemas.openxmlformats.org/presentationml/2006/main">
-  <p:tag name="KSO_WM_UNIT_TABLE_BEAUTIFY" val="smartTable{bbcd7454-3b0d-43ea-92c6-4dfd9acf7004}"/>
+  <p:tag name="KSO_WM_UNIT_TABLE_BEAUTIFY" val="smartTable{5c956cc4-db63-49c0-ad52-824b3cec624c}"/>
   <p:tag name="TABLE_ENDDRAG_ORIGIN_RECT" val="864*241"/>
   <p:tag name="TABLE_ENDDRAG_RECT" val="50*103*864*241"/>
 </p:tagLst>
@@ -13094,7 +13513,7 @@
 
 <file path=ppt/tags/tag24.xml><?xml version="1.0" encoding="utf-8"?>
 <p:tagLst xmlns:p="http://schemas.openxmlformats.org/presentationml/2006/main">
-  <p:tag name="KSO_WM_UNIT_TABLE_BEAUTIFY" val="smartTable{9031ed06-a11d-4bb1-bbcb-1dabbcd60d03}"/>
+  <p:tag name="KSO_WM_UNIT_TABLE_BEAUTIFY" val="smartTable{45787457-ca80-4eac-8c56-e84ee1f96a90}"/>
   <p:tag name="TABLE_ENDDRAG_ORIGIN_RECT" val="876*282"/>
   <p:tag name="TABLE_ENDDRAG_RECT" val="50*103*876*282"/>
 </p:tagLst>
@@ -13110,7 +13529,7 @@
 
 <file path=ppt/tags/tag26.xml><?xml version="1.0" encoding="utf-8"?>
 <p:tagLst xmlns:p="http://schemas.openxmlformats.org/presentationml/2006/main">
-  <p:tag name="KSO_WM_UNIT_TABLE_BEAUTIFY" val="smartTable{d920ecfc-a509-4946-9fa3-cee93da9988a}"/>
+  <p:tag name="KSO_WM_UNIT_TABLE_BEAUTIFY" val="smartTable{0bf6bbf9-3568-49a4-8aad-b96e371dbda5}"/>
   <p:tag name="TABLE_ENDDRAG_ORIGIN_RECT" val="876*166"/>
   <p:tag name="TABLE_ENDDRAG_RECT" val="49*79*876*166"/>
   <p:tag name="KSO_WM_BEAUTIFY_FLAG" val=""/>
@@ -13153,7 +13572,7 @@
 
 <file path=ppt/tags/tag30.xml><?xml version="1.0" encoding="utf-8"?>
 <p:tagLst xmlns:p="http://schemas.openxmlformats.org/presentationml/2006/main">
-  <p:tag name="KSO_WM_UNIT_TABLE_BEAUTIFY" val="smartTable{4251b623-9156-4c3b-ba66-5265f5710ca3}"/>
+  <p:tag name="KSO_WM_UNIT_TABLE_BEAUTIFY" val="smartTable{58b56caa-9cf0-4f8c-8040-1109d2d2fb11}"/>
   <p:tag name="TABLE_ENDDRAG_ORIGIN_RECT" val="822*177"/>
   <p:tag name="TABLE_ENDDRAG_RECT" val="92*177*822*177"/>
 </p:tagLst>
@@ -13185,7 +13604,7 @@
 
 <file path=ppt/tags/tag34.xml><?xml version="1.0" encoding="utf-8"?>
 <p:tagLst xmlns:p="http://schemas.openxmlformats.org/presentationml/2006/main">
-  <p:tag name="KSO_WM_UNIT_TABLE_BEAUTIFY" val="smartTable{e5095ace-7e22-4763-b691-f0ef9856fecf}"/>
+  <p:tag name="KSO_WM_UNIT_TABLE_BEAUTIFY" val="smartTable{58594da0-0bbc-4608-9f78-9a94747abf9e}"/>
   <p:tag name="TABLE_ENDDRAG_ORIGIN_RECT" val="864*230"/>
   <p:tag name="TABLE_ENDDRAG_RECT" val="50*195*864*230"/>
   <p:tag name="KSO_WM_BEAUTIFY_FLAG" val=""/>
@@ -13354,6 +13773,14 @@
 </file>
 
 <file path=ppt/tags/tag50.xml><?xml version="1.0" encoding="utf-8"?>
+<p:tagLst xmlns:p="http://schemas.openxmlformats.org/presentationml/2006/main">
+  <p:tag name="KSO_WM_BEAUTIFY_FLAG" val="#wm#"/>
+  <p:tag name="KSO_WM_TEMPLATE_CATEGORY" val="custom"/>
+  <p:tag name="KSO_WM_TEMPLATE_INDEX" val="160402"/>
+</p:tagLst>
+</file>
+
+<file path=ppt/tags/tag51.xml><?xml version="1.0" encoding="utf-8"?>
 <p:tagLst xmlns:p="http://schemas.openxmlformats.org/presentationml/2006/main">
   <p:tag name="COMMONDATA" val="eyJoZGlkIjoiYjRhZjQ5NWVmZmQxNmM3NmNkNDYxNWRmNzNmMjA1ZDAifQ=="/>
   <p:tag name="KSO_WPP_MARK_KEY" val="912f9f82-e1da-4214-83c0-2ace56e3deee"/>

--- a/Misc/Docker-Notes.pptx
+++ b/Misc/Docker-Notes.pptx
@@ -152,12 +152,12 @@
   <p:extLst>
     <p:ext uri="{EFAFB233-063F-42B5-8137-9DF3F51BA10A}">
       <p15:sldGuideLst xmlns:p15="http://schemas.microsoft.com/office/powerpoint/2012/main">
-        <p15:guide id="1" orient="horz" pos="2205" userDrawn="1">
+        <p15:guide id="1" orient="horz" pos="2196" userDrawn="1">
           <p15:clr>
             <a:srgbClr val="A4A3A4"/>
           </p15:clr>
         </p15:guide>
-        <p15:guide id="2" pos="3840" userDrawn="1">
+        <p15:guide id="2" pos="3858" userDrawn="1">
           <p15:clr>
             <a:srgbClr val="A4A3A4"/>
           </p15:clr>
@@ -8147,6 +8147,22 @@
             </a:r>
             <a:endParaRPr lang="en-US" altLang="zh-CN"/>
           </a:p>
+          <a:p>
+            <a:pPr lvl="0"/>
+            <a:r>
+              <a:rPr lang="en-US" altLang="zh-CN"/>
+              <a:t>Parallel build (v2.20+)</a:t>
+            </a:r>
+            <a:endParaRPr lang="en-US" altLang="zh-CN"/>
+          </a:p>
+          <a:p>
+            <a:pPr lvl="1"/>
+            <a:r>
+              <a:rPr lang="en-US" altLang="zh-CN"/>
+              <a:t>COMPOSE_BAKE=true docker compose build</a:t>
+            </a:r>
+            <a:endParaRPr lang="en-US" altLang="zh-CN"/>
+          </a:p>
         </p:txBody>
       </p:sp>
     </p:spTree>
@@ -8641,9 +8657,440 @@
           </a:p>
         </p:txBody>
       </p:sp>
+      <p:sp>
+        <p:nvSpPr>
+          <p:cNvPr id="5" name="内容占位符 2"/>
+          <p:cNvSpPr>
+            <a:spLocks noGrp="1"/>
+          </p:cNvSpPr>
+          <p:nvPr/>
+        </p:nvSpPr>
+        <p:spPr>
+          <a:xfrm>
+            <a:off x="6513830" y="1198245"/>
+            <a:ext cx="5287010" cy="3712845"/>
+          </a:xfrm>
+          <a:prstGeom prst="rect">
+            <a:avLst/>
+          </a:prstGeom>
+        </p:spPr>
+        <p:txBody>
+          <a:bodyPr vert="horz" lIns="91440" tIns="45720" rIns="91440" bIns="45720" rtlCol="0"/>
+          <a:lstStyle>
+            <a:lvl1pPr marL="342900" indent="-342900" algn="l" defTabSz="914400" rtl="0" eaLnBrk="1" latinLnBrk="0" hangingPunct="1">
+              <a:lnSpc>
+                <a:spcPct val="90000"/>
+              </a:lnSpc>
+              <a:spcBef>
+                <a:spcPts val="1000"/>
+              </a:spcBef>
+              <a:buFont typeface="黑体" panose="02010609060101010101" pitchFamily="49" charset="-122"/>
+              <a:buChar char="〉"/>
+              <a:defRPr sz="2400" kern="1200">
+                <a:solidFill>
+                  <a:schemeClr val="tx1"/>
+                </a:solidFill>
+                <a:latin typeface="+mn-lt"/>
+                <a:ea typeface="+mn-ea"/>
+                <a:cs typeface="+mn-cs"/>
+              </a:defRPr>
+            </a:lvl1pPr>
+            <a:lvl2pPr marL="800100" indent="-342900" algn="l" defTabSz="914400" rtl="0" eaLnBrk="1" latinLnBrk="0" hangingPunct="1">
+              <a:lnSpc>
+                <a:spcPct val="90000"/>
+              </a:lnSpc>
+              <a:spcBef>
+                <a:spcPts val="500"/>
+              </a:spcBef>
+              <a:buFont typeface="Arial" panose="020B0604020202020204" pitchFamily="34" charset="0"/>
+              <a:buChar char="•"/>
+              <a:defRPr sz="2000" kern="1200">
+                <a:solidFill>
+                  <a:schemeClr val="tx1"/>
+                </a:solidFill>
+                <a:latin typeface="+mn-lt"/>
+                <a:ea typeface="+mn-ea"/>
+                <a:cs typeface="+mn-cs"/>
+              </a:defRPr>
+            </a:lvl2pPr>
+            <a:lvl3pPr marL="1257300" indent="-342900" algn="l" defTabSz="914400" rtl="0" eaLnBrk="1" latinLnBrk="0" hangingPunct="1">
+              <a:lnSpc>
+                <a:spcPct val="90000"/>
+              </a:lnSpc>
+              <a:spcBef>
+                <a:spcPts val="500"/>
+              </a:spcBef>
+              <a:buFont typeface="Arial" panose="020B0604020202020204" pitchFamily="34" charset="0"/>
+              <a:buChar char="•"/>
+              <a:defRPr sz="1800" kern="1200">
+                <a:solidFill>
+                  <a:schemeClr val="tx1"/>
+                </a:solidFill>
+                <a:latin typeface="+mn-lt"/>
+                <a:ea typeface="+mn-ea"/>
+                <a:cs typeface="+mn-cs"/>
+              </a:defRPr>
+            </a:lvl3pPr>
+            <a:lvl4pPr marL="1657350" indent="-285750" algn="l" defTabSz="914400" rtl="0" eaLnBrk="1" latinLnBrk="0" hangingPunct="1">
+              <a:lnSpc>
+                <a:spcPct val="90000"/>
+              </a:lnSpc>
+              <a:spcBef>
+                <a:spcPts val="500"/>
+              </a:spcBef>
+              <a:buFont typeface="Arial" panose="020B0604020202020204" pitchFamily="34" charset="0"/>
+              <a:buChar char="•"/>
+              <a:defRPr sz="1800" kern="1200">
+                <a:solidFill>
+                  <a:schemeClr val="tx1"/>
+                </a:solidFill>
+                <a:latin typeface="+mn-lt"/>
+                <a:ea typeface="+mn-ea"/>
+                <a:cs typeface="+mn-cs"/>
+              </a:defRPr>
+            </a:lvl4pPr>
+            <a:lvl5pPr marL="2114550" indent="-285750" algn="l" defTabSz="914400" rtl="0" eaLnBrk="1" latinLnBrk="0" hangingPunct="1">
+              <a:lnSpc>
+                <a:spcPct val="90000"/>
+              </a:lnSpc>
+              <a:spcBef>
+                <a:spcPts val="500"/>
+              </a:spcBef>
+              <a:buFont typeface="Arial" panose="020B0604020202020204" pitchFamily="34" charset="0"/>
+              <a:buChar char="•"/>
+              <a:defRPr sz="1800" kern="1200">
+                <a:solidFill>
+                  <a:schemeClr val="tx1"/>
+                </a:solidFill>
+                <a:latin typeface="+mn-lt"/>
+                <a:ea typeface="+mn-ea"/>
+                <a:cs typeface="+mn-cs"/>
+              </a:defRPr>
+            </a:lvl5pPr>
+            <a:lvl6pPr marL="2514600" indent="-228600" algn="l" defTabSz="914400" rtl="0" eaLnBrk="1" latinLnBrk="0" hangingPunct="1">
+              <a:lnSpc>
+                <a:spcPct val="90000"/>
+              </a:lnSpc>
+              <a:spcBef>
+                <a:spcPts val="500"/>
+              </a:spcBef>
+              <a:buFont typeface="Arial" panose="020B0604020202020204" pitchFamily="34" charset="0"/>
+              <a:buChar char="•"/>
+              <a:defRPr sz="1800" kern="1200">
+                <a:solidFill>
+                  <a:schemeClr val="tx1"/>
+                </a:solidFill>
+                <a:latin typeface="+mn-lt"/>
+                <a:ea typeface="+mn-ea"/>
+                <a:cs typeface="+mn-cs"/>
+              </a:defRPr>
+            </a:lvl6pPr>
+            <a:lvl7pPr marL="2971800" indent="-228600" algn="l" defTabSz="914400" rtl="0" eaLnBrk="1" latinLnBrk="0" hangingPunct="1">
+              <a:lnSpc>
+                <a:spcPct val="90000"/>
+              </a:lnSpc>
+              <a:spcBef>
+                <a:spcPts val="500"/>
+              </a:spcBef>
+              <a:buFont typeface="Arial" panose="020B0604020202020204" pitchFamily="34" charset="0"/>
+              <a:buChar char="•"/>
+              <a:defRPr sz="1800" kern="1200">
+                <a:solidFill>
+                  <a:schemeClr val="tx1"/>
+                </a:solidFill>
+                <a:latin typeface="+mn-lt"/>
+                <a:ea typeface="+mn-ea"/>
+                <a:cs typeface="+mn-cs"/>
+              </a:defRPr>
+            </a:lvl7pPr>
+            <a:lvl8pPr marL="3429000" indent="-228600" algn="l" defTabSz="914400" rtl="0" eaLnBrk="1" latinLnBrk="0" hangingPunct="1">
+              <a:lnSpc>
+                <a:spcPct val="90000"/>
+              </a:lnSpc>
+              <a:spcBef>
+                <a:spcPts val="500"/>
+              </a:spcBef>
+              <a:buFont typeface="Arial" panose="020B0604020202020204" pitchFamily="34" charset="0"/>
+              <a:buChar char="•"/>
+              <a:defRPr sz="1800" kern="1200">
+                <a:solidFill>
+                  <a:schemeClr val="tx1"/>
+                </a:solidFill>
+                <a:latin typeface="+mn-lt"/>
+                <a:ea typeface="+mn-ea"/>
+                <a:cs typeface="+mn-cs"/>
+              </a:defRPr>
+            </a:lvl8pPr>
+            <a:lvl9pPr marL="3886200" indent="-228600" algn="l" defTabSz="914400" rtl="0" eaLnBrk="1" latinLnBrk="0" hangingPunct="1">
+              <a:lnSpc>
+                <a:spcPct val="90000"/>
+              </a:lnSpc>
+              <a:spcBef>
+                <a:spcPts val="500"/>
+              </a:spcBef>
+              <a:buFont typeface="Arial" panose="020B0604020202020204" pitchFamily="34" charset="0"/>
+              <a:buChar char="•"/>
+              <a:defRPr sz="1800" kern="1200">
+                <a:solidFill>
+                  <a:schemeClr val="tx1"/>
+                </a:solidFill>
+                <a:latin typeface="+mn-lt"/>
+                <a:ea typeface="+mn-ea"/>
+                <a:cs typeface="+mn-cs"/>
+              </a:defRPr>
+            </a:lvl9pPr>
+          </a:lstStyle>
+          <a:p>
+            <a:pPr lvl="1"/>
+            <a:r>
+              <a:rPr lang="en-US" altLang="zh-CN" sz="1400">
+                <a:sym typeface="+mn-ea"/>
+              </a:rPr>
+              <a:t>healthcheck:</a:t>
+            </a:r>
+            <a:endParaRPr lang="en-US" altLang="zh-CN" sz="1400">
+              <a:sym typeface="+mn-ea"/>
+            </a:endParaRPr>
+          </a:p>
+          <a:p>
+            <a:pPr lvl="2"/>
+            <a:r>
+              <a:rPr lang="en-US" altLang="zh-CN" sz="1200">
+                <a:sym typeface="+mn-ea"/>
+              </a:rPr>
+              <a:t>  # </a:t>
+            </a:r>
+            <a:r>
+              <a:rPr lang="zh-CN" altLang="en-US" sz="1200">
+                <a:sym typeface="+mn-ea"/>
+              </a:rPr>
+              <a:t>检查命令（必需）</a:t>
+            </a:r>
+            <a:endParaRPr lang="zh-CN" altLang="en-US" sz="1200">
+              <a:sym typeface="+mn-ea"/>
+            </a:endParaRPr>
+          </a:p>
+          <a:p>
+            <a:pPr lvl="2"/>
+            <a:r>
+              <a:rPr lang="en-US" altLang="zh-CN" sz="1200">
+                <a:sym typeface="+mn-ea"/>
+              </a:rPr>
+              <a:t>  test: &lt;string|array&gt;</a:t>
+            </a:r>
+            <a:endParaRPr lang="en-US" altLang="zh-CN" sz="1200">
+              <a:sym typeface="+mn-ea"/>
+            </a:endParaRPr>
+          </a:p>
+          <a:p>
+            <a:pPr lvl="2"/>
+            <a:r>
+              <a:rPr lang="en-US" altLang="zh-CN" sz="1200">
+                <a:sym typeface="+mn-ea"/>
+              </a:rPr>
+              <a:t>    # </a:t>
+            </a:r>
+            <a:r>
+              <a:rPr lang="zh-CN" altLang="en-US" sz="1200">
+                <a:sym typeface="+mn-ea"/>
+              </a:rPr>
+              <a:t>可选参数（都有默认值）</a:t>
+            </a:r>
+            <a:endParaRPr lang="zh-CN" altLang="en-US" sz="1200">
+              <a:sym typeface="+mn-ea"/>
+            </a:endParaRPr>
+          </a:p>
+          <a:p>
+            <a:pPr lvl="2"/>
+            <a:r>
+              <a:rPr lang="en-US" altLang="zh-CN" sz="1200">
+                <a:sym typeface="+mn-ea"/>
+              </a:rPr>
+              <a:t>  interval: 30s      # </a:t>
+            </a:r>
+            <a:r>
+              <a:rPr lang="zh-CN" altLang="en-US" sz="1200">
+                <a:sym typeface="+mn-ea"/>
+              </a:rPr>
+              <a:t>检查间隔</a:t>
+            </a:r>
+            <a:endParaRPr lang="zh-CN" altLang="en-US" sz="1200">
+              <a:sym typeface="+mn-ea"/>
+            </a:endParaRPr>
+          </a:p>
+          <a:p>
+            <a:pPr lvl="2"/>
+            <a:r>
+              <a:rPr lang="en-US" altLang="zh-CN" sz="1200">
+                <a:sym typeface="+mn-ea"/>
+              </a:rPr>
+              <a:t>  timeout: 30s       # </a:t>
+            </a:r>
+            <a:r>
+              <a:rPr lang="zh-CN" altLang="en-US" sz="1200">
+                <a:sym typeface="+mn-ea"/>
+              </a:rPr>
+              <a:t>命令超时时间</a:t>
+            </a:r>
+            <a:endParaRPr lang="zh-CN" altLang="en-US" sz="1200">
+              <a:sym typeface="+mn-ea"/>
+            </a:endParaRPr>
+          </a:p>
+          <a:p>
+            <a:pPr lvl="2"/>
+            <a:r>
+              <a:rPr lang="en-US" altLang="zh-CN" sz="1200">
+                <a:sym typeface="+mn-ea"/>
+              </a:rPr>
+              <a:t>  retries: 3         # </a:t>
+            </a:r>
+            <a:r>
+              <a:rPr lang="zh-CN" altLang="en-US" sz="1200">
+                <a:sym typeface="+mn-ea"/>
+              </a:rPr>
+              <a:t>失败重试次数</a:t>
+            </a:r>
+            <a:endParaRPr lang="zh-CN" altLang="en-US" sz="1200">
+              <a:sym typeface="+mn-ea"/>
+            </a:endParaRPr>
+          </a:p>
+          <a:p>
+            <a:pPr lvl="2"/>
+            <a:r>
+              <a:rPr lang="en-US" altLang="zh-CN" sz="1200">
+                <a:sym typeface="+mn-ea"/>
+              </a:rPr>
+              <a:t>  start_period: 0s   # </a:t>
+            </a:r>
+            <a:r>
+              <a:rPr lang="zh-CN" altLang="en-US" sz="1200">
+                <a:sym typeface="+mn-ea"/>
+              </a:rPr>
+              <a:t>容器启动后的等待时间</a:t>
+            </a:r>
+            <a:endParaRPr lang="zh-CN" altLang="en-US" sz="1200">
+              <a:sym typeface="+mn-ea"/>
+            </a:endParaRPr>
+          </a:p>
+          <a:p>
+            <a:pPr lvl="2"/>
+            <a:r>
+              <a:rPr lang="en-US" altLang="zh-CN" sz="1200">
+                <a:sym typeface="+mn-ea"/>
+              </a:rPr>
+              <a:t>  start_interval: 0s # </a:t>
+            </a:r>
+            <a:r>
+              <a:rPr lang="zh-CN" altLang="en-US" sz="1200">
+                <a:sym typeface="+mn-ea"/>
+              </a:rPr>
+              <a:t>启动期间检查间隔</a:t>
+            </a:r>
+            <a:endParaRPr lang="zh-CN" altLang="en-US" sz="1200">
+              <a:sym typeface="+mn-ea"/>
+            </a:endParaRPr>
+          </a:p>
+          <a:p>
+            <a:pPr lvl="1"/>
+            <a:r>
+              <a:rPr lang="en-US" altLang="zh-CN" sz="1400">
+                <a:sym typeface="+mn-ea"/>
+              </a:rPr>
+              <a:t>logging</a:t>
+            </a:r>
+            <a:endParaRPr lang="en-US" altLang="zh-CN" sz="1400"/>
+          </a:p>
+          <a:p>
+            <a:pPr lvl="2"/>
+            <a:r>
+              <a:rPr lang="en-US" altLang="zh-CN" sz="1200">
+                <a:sym typeface="+mn-ea"/>
+              </a:rPr>
+              <a:t>logging:</a:t>
+            </a:r>
+            <a:endParaRPr lang="en-US" altLang="zh-CN" sz="1200"/>
+          </a:p>
+          <a:p>
+            <a:pPr lvl="2"/>
+            <a:r>
+              <a:rPr lang="en-US" altLang="zh-CN" sz="1200">
+                <a:sym typeface="+mn-ea"/>
+              </a:rPr>
+              <a:t>    driver: "json-file"</a:t>
+            </a:r>
+            <a:endParaRPr lang="en-US" altLang="zh-CN" sz="1200">
+              <a:sym typeface="+mn-ea"/>
+            </a:endParaRPr>
+          </a:p>
+          <a:p>
+            <a:pPr lvl="3"/>
+            <a:r>
+              <a:rPr lang="en-US" altLang="zh-CN" sz="1000">
+                <a:sym typeface="+mn-ea"/>
+              </a:rPr>
+              <a:t># /data/system/docker/{container-id}/{container-id}-json.log</a:t>
+            </a:r>
+            <a:endParaRPr lang="en-US" altLang="zh-CN" sz="1000"/>
+          </a:p>
+          <a:p>
+            <a:pPr lvl="2"/>
+            <a:r>
+              <a:rPr lang="en-US" altLang="zh-CN" sz="1200">
+                <a:sym typeface="+mn-ea"/>
+              </a:rPr>
+              <a:t>    options:</a:t>
+            </a:r>
+            <a:endParaRPr lang="en-US" altLang="zh-CN" sz="1200"/>
+          </a:p>
+          <a:p>
+            <a:pPr lvl="3"/>
+            <a:r>
+              <a:rPr lang="en-US" altLang="zh-CN" sz="1000">
+                <a:sym typeface="+mn-ea"/>
+              </a:rPr>
+              <a:t>max-size: "10m"   # Rotate when a file reaches 10MB</a:t>
+            </a:r>
+            <a:endParaRPr lang="en-US" altLang="zh-CN" sz="1000"/>
+          </a:p>
+          <a:p>
+            <a:pPr lvl="3"/>
+            <a:r>
+              <a:rPr lang="en-US" altLang="zh-CN" sz="1000">
+                <a:sym typeface="+mn-ea"/>
+              </a:rPr>
+              <a:t>max-file: "5"     # Keep the last 5 rotated files</a:t>
+            </a:r>
+            <a:endParaRPr lang="en-US" altLang="zh-CN" sz="1000">
+              <a:sym typeface="+mn-ea"/>
+            </a:endParaRPr>
+          </a:p>
+        </p:txBody>
+      </p:sp>
+      <p:pic>
+        <p:nvPicPr>
+          <p:cNvPr id="6" name="图片 5"/>
+          <p:cNvPicPr/>
+          <p:nvPr/>
+        </p:nvPicPr>
+        <p:blipFill>
+          <a:blip r:embed="rId1"/>
+          <a:stretch>
+            <a:fillRect/>
+          </a:stretch>
+        </p:blipFill>
+        <p:spPr>
+          <a:xfrm>
+            <a:off x="6351905" y="5275580"/>
+            <a:ext cx="5753735" cy="1082675"/>
+          </a:xfrm>
+          <a:prstGeom prst="rect">
+            <a:avLst/>
+          </a:prstGeom>
+        </p:spPr>
+      </p:pic>
     </p:spTree>
     <p:custDataLst>
-      <p:tags r:id="rId1"/>
+      <p:tags r:id="rId2"/>
     </p:custDataLst>
   </p:cSld>
   <p:clrMapOvr>
@@ -8899,7 +9346,11 @@
                       <a:pPr>
                         <a:buNone/>
                       </a:pPr>
-                      <a:endParaRPr lang="zh-CN" altLang="en-US" sz="1600"/>
+                      <a:r>
+                        <a:rPr lang="en-US" altLang="zh-CN" sz="1600"/>
+                        <a:t>--progress=plain</a:t>
+                      </a:r>
+                      <a:endParaRPr lang="en-US" altLang="zh-CN" sz="1600"/>
                     </a:p>
                   </a:txBody>
                   <a:tcPr/>
@@ -9455,119 +9906,115 @@
         <p:spPr>
           <a:xfrm>
             <a:off x="838200" y="1211580"/>
-            <a:ext cx="6932930" cy="4549140"/>
+            <a:ext cx="6932930" cy="5062220"/>
           </a:xfrm>
         </p:spPr>
         <p:txBody>
           <a:bodyPr>
-            <a:normAutofit fontScale="70000"/>
+            <a:noAutofit/>
           </a:bodyPr>
           <a:p>
             <a:r>
-              <a:rPr lang="en-US" altLang="zh-CN"/>
+              <a:rPr lang="en-US" altLang="zh-CN" sz="1600"/>
               <a:t>Logic for docker compose up</a:t>
             </a:r>
-            <a:endParaRPr lang="en-US" altLang="zh-CN"/>
+            <a:endParaRPr lang="en-US" altLang="zh-CN" sz="1600"/>
           </a:p>
           <a:p>
             <a:pPr lvl="1"/>
             <a:r>
-              <a:rPr lang="en-US" altLang="zh-CN"/>
+              <a:rPr lang="en-US" altLang="zh-CN" sz="1400"/>
               <a:t>A network called myapp_default is created, myapp is the name of the folder where this docker-compose.yml file is located</a:t>
             </a:r>
-            <a:endParaRPr lang="en-US" altLang="zh-CN"/>
+            <a:endParaRPr lang="en-US" altLang="zh-CN" sz="1400"/>
           </a:p>
           <a:p>
             <a:pPr lvl="2"/>
             <a:r>
-              <a:rPr lang="en-US" altLang="zh-CN" sz="1800"/>
+              <a:rPr lang="en-US" altLang="zh-CN" sz="1200"/>
               <a:t>this name can be overriden with -p {projectname} when run docker-compose up</a:t>
             </a:r>
-            <a:endParaRPr lang="en-US" altLang="zh-CN"/>
+            <a:endParaRPr lang="en-US" altLang="zh-CN" sz="1200"/>
           </a:p>
           <a:p>
             <a:pPr lvl="1"/>
             <a:r>
-              <a:rPr lang="en-US" altLang="zh-CN"/>
+              <a:rPr lang="en-US" altLang="zh-CN" sz="1400"/>
               <a:t>A container is created using web’s configuration. It joins the network myapp_default under the name web</a:t>
             </a:r>
-            <a:endParaRPr lang="en-US" altLang="zh-CN"/>
+            <a:endParaRPr lang="en-US" altLang="zh-CN" sz="1400"/>
           </a:p>
           <a:p>
             <a:pPr lvl="1"/>
             <a:r>
-              <a:rPr lang="en-US" altLang="zh-CN"/>
+              <a:rPr lang="en-US" altLang="zh-CN" sz="1400"/>
               <a:t>A container is created using db’s configuration. It joins the network myapp_default under the name db</a:t>
             </a:r>
-            <a:endParaRPr lang="en-US" altLang="zh-CN"/>
+            <a:endParaRPr lang="en-US" altLang="zh-CN" sz="1400"/>
           </a:p>
           <a:p>
             <a:pPr lvl="0"/>
             <a:r>
-              <a:rPr lang="en-US" altLang="zh-CN"/>
+              <a:rPr lang="en-US" altLang="zh-CN" sz="1600"/>
               <a:t>Set project name</a:t>
             </a:r>
-            <a:endParaRPr lang="en-US" altLang="zh-CN"/>
+            <a:endParaRPr lang="en-US" altLang="zh-CN" sz="1600"/>
           </a:p>
           <a:p>
             <a:pPr lvl="1"/>
             <a:r>
-              <a:rPr lang="en-US" altLang="zh-CN"/>
+              <a:rPr lang="en-US" altLang="zh-CN" sz="1400"/>
               <a:t>Define in .env</a:t>
             </a:r>
-            <a:endParaRPr lang="en-US" altLang="zh-CN"/>
+            <a:endParaRPr lang="en-US" altLang="zh-CN" sz="1400"/>
           </a:p>
           <a:p>
             <a:pPr lvl="2"/>
             <a:r>
-              <a:rPr lang="en-US" altLang="zh-CN"/>
+              <a:rPr lang="en-US" altLang="zh-CN" sz="1200"/>
               <a:t>COMPOSE_PROJECT_NAME=SOMEPROJECTNAME</a:t>
             </a:r>
-            <a:endParaRPr lang="en-US" altLang="zh-CN"/>
+            <a:endParaRPr lang="en-US" altLang="zh-CN" sz="1200"/>
           </a:p>
           <a:p>
             <a:pPr lvl="1"/>
             <a:r>
-              <a:rPr lang="en-US" altLang="zh-CN" sz="2000"/>
+              <a:rPr lang="en-US" altLang="zh-CN" sz="1400"/>
               <a:t>All containers, networks, volumes, and images are prepended with this project name.</a:t>
             </a:r>
-            <a:endParaRPr lang="en-US" altLang="zh-CN"/>
+            <a:endParaRPr lang="en-US" altLang="zh-CN" sz="1400"/>
           </a:p>
           <a:p>
             <a:pPr lvl="0"/>
             <a:r>
-              <a:rPr lang="en-US" altLang="zh-CN"/>
+              <a:rPr lang="en-US" altLang="zh-CN" sz="1600"/>
               <a:t>docker-compose.yml</a:t>
             </a:r>
-            <a:endParaRPr lang="en-US" altLang="zh-CN"/>
+            <a:endParaRPr lang="en-US" altLang="zh-CN" sz="1600"/>
           </a:p>
           <a:p>
             <a:pPr lvl="1"/>
             <a:r>
-              <a:rPr lang="en-US" altLang="zh-CN"/>
+              <a:rPr lang="en-US" altLang="zh-CN" sz="1400"/>
               <a:t>docker-compose.override.yml</a:t>
             </a:r>
-            <a:endParaRPr lang="en-US" altLang="zh-CN"/>
+            <a:endParaRPr lang="en-US" altLang="zh-CN" sz="1400"/>
           </a:p>
           <a:p>
             <a:pPr lvl="2"/>
             <a:r>
-              <a:rPr lang="en-US" altLang="zh-CN"/>
+              <a:rPr lang="en-US" altLang="zh-CN" sz="1200"/>
               <a:t>override config in docker-compose.yml</a:t>
             </a:r>
-            <a:endParaRPr lang="en-US" altLang="zh-CN"/>
+            <a:endParaRPr lang="en-US" altLang="zh-CN" sz="1200"/>
           </a:p>
           <a:p>
             <a:pPr lvl="1"/>
             <a:r>
-              <a:rPr lang="en-US" altLang="zh-CN"/>
+              <a:rPr lang="en-US" altLang="zh-CN" sz="1400"/>
               <a:t>set time zone</a:t>
             </a:r>
-            <a:endParaRPr lang="en-US" altLang="zh-CN"/>
-          </a:p>
-          <a:p>
-            <a:pPr lvl="2"/>
-            <a:endParaRPr lang="en-US" altLang="zh-CN"/>
+            <a:endParaRPr lang="en-US" altLang="zh-CN" sz="1400"/>
           </a:p>
         </p:txBody>
       </p:sp>
@@ -11204,7 +11651,9 @@
         </p:nvSpPr>
         <p:spPr/>
         <p:txBody>
-          <a:bodyPr/>
+          <a:bodyPr>
+            <a:normAutofit lnSpcReduction="10000"/>
+          </a:bodyPr>
           <a:p>
             <a:r>
               <a:rPr lang="zh-CN" altLang="en-US"/>
@@ -11245,12 +11694,40 @@
               <a:buNone/>
             </a:pPr>
             <a:r>
-              <a:rPr lang="zh-CN" altLang="en-US"/>
-              <a:t>"https://mirror.ccs.tencentyun.com"</a:t>
-            </a:r>
-            <a:r>
-              <a:rPr lang="en-US" altLang="zh-CN"/>
-              <a:t>,</a:t>
+              <a:rPr lang="en-US" altLang="zh-CN"/>
+              <a:t>"https://mirror.ccs.tencentyun.com",</a:t>
+            </a:r>
+            <a:endParaRPr lang="en-US" altLang="zh-CN"/>
+          </a:p>
+          <a:p>
+            <a:pPr marL="1371600" lvl="3" indent="457200">
+              <a:buNone/>
+            </a:pPr>
+            <a:r>
+              <a:rPr lang="en-US" altLang="zh-CN"/>
+              <a:t>"https://&lt;your_code&gt;.mirror.aliyuncs.com",</a:t>
+            </a:r>
+            <a:endParaRPr lang="en-US" altLang="zh-CN"/>
+          </a:p>
+          <a:p>
+            <a:pPr marL="1371600" lvl="6" indent="457200">
+              <a:buNone/>
+            </a:pPr>
+            <a:r>
+              <a:rPr lang="en-US" altLang="zh-CN">
+                <a:sym typeface="+mn-ea"/>
+              </a:rPr>
+              <a:t>"https://docker.xuanyuan.me",</a:t>
+            </a:r>
+            <a:endParaRPr lang="en-US" altLang="zh-CN"/>
+          </a:p>
+          <a:p>
+            <a:pPr marL="1371600" lvl="3" indent="457200">
+              <a:buNone/>
+            </a:pPr>
+            <a:r>
+              <a:rPr lang="en-US" altLang="zh-CN"/>
+              <a:t>"https://docker.m.daocloud.io"</a:t>
             </a:r>
             <a:endParaRPr lang="zh-CN" altLang="en-US"/>
           </a:p>
@@ -11986,7 +12463,35 @@
         <p:txBody>
           <a:bodyPr/>
           <a:p>
-            <a:endParaRPr lang="zh-CN" altLang="en-US"/>
+            <a:r>
+              <a:rPr lang="en-US" altLang="zh-CN"/>
+              <a:t>docker compose build errors</a:t>
+            </a:r>
+            <a:endParaRPr lang="en-US" altLang="zh-CN"/>
+          </a:p>
+          <a:p>
+            <a:pPr lvl="1"/>
+            <a:r>
+              <a:rPr lang="en-US" altLang="zh-CN"/>
+              <a:t>DOCKER_BUILDKIT=0 docker compose build</a:t>
+            </a:r>
+            <a:endParaRPr lang="en-US" altLang="zh-CN"/>
+          </a:p>
+          <a:p>
+            <a:pPr lvl="1"/>
+            <a:r>
+              <a:rPr lang="en-US" altLang="zh-CN"/>
+              <a:t>Or add in config.json</a:t>
+            </a:r>
+            <a:endParaRPr lang="en-US" altLang="zh-CN"/>
+          </a:p>
+          <a:p>
+            <a:pPr lvl="2"/>
+            <a:r>
+              <a:rPr lang="en-US" altLang="zh-CN"/>
+              <a:t>"buildkit": false</a:t>
+            </a:r>
+            <a:endParaRPr lang="en-US" altLang="zh-CN"/>
           </a:p>
         </p:txBody>
       </p:sp>
@@ -13457,7 +13962,7 @@
 
 <file path=ppt/tags/tag18.xml><?xml version="1.0" encoding="utf-8"?>
 <p:tagLst xmlns:p="http://schemas.openxmlformats.org/presentationml/2006/main">
-  <p:tag name="KSO_WM_UNIT_TABLE_BEAUTIFY" val="smartTable{4e9f41ed-e86b-4ecb-a85b-0604050b1234}"/>
+  <p:tag name="KSO_WM_UNIT_TABLE_BEAUTIFY" val="smartTable{7f6a322a-3dfb-41fd-8b75-90114ce53e92}"/>
   <p:tag name="TABLE_ENDDRAG_ORIGIN_RECT" val="876*335"/>
   <p:tag name="TABLE_ENDDRAG_RECT" val="49*79*876*335"/>
 </p:tagLst>
@@ -13604,7 +14109,7 @@
 
 <file path=ppt/tags/tag34.xml><?xml version="1.0" encoding="utf-8"?>
 <p:tagLst xmlns:p="http://schemas.openxmlformats.org/presentationml/2006/main">
-  <p:tag name="KSO_WM_UNIT_TABLE_BEAUTIFY" val="smartTable{58594da0-0bbc-4608-9f78-9a94747abf9e}"/>
+  <p:tag name="KSO_WM_UNIT_TABLE_BEAUTIFY" val="smartTable{39f282ca-f1b6-48b4-9502-cfe4f0873dd6}"/>
   <p:tag name="TABLE_ENDDRAG_ORIGIN_RECT" val="864*230"/>
   <p:tag name="TABLE_ENDDRAG_RECT" val="50*195*864*230"/>
   <p:tag name="KSO_WM_BEAUTIFY_FLAG" val=""/>
